--- a/docs/pptx/Ch7_SUPPLEMENT.pptx
+++ b/docs/pptx/Ch7_SUPPLEMENT.pptx
@@ -503,10 +503,23 @@
           <a:lstStyle/>
           <a:p>
             <a:r>
-              <a:rPr lang="en-US" dirty="0"/>
-              <a:t/>
-            </a:r>
-            <a:endParaRPr lang="en-US" dirty="0"/>
+              <a:t>PROF: Exercice D2 — rédaction de l'argumentation.</a:t>
+            </a:r>
+          </a:p>
+          <a:p>
+            <a:r>
+              <a:t>Structure imposée : intro + 3 arguments + ce que POO ajoute + conclusion.</a:t>
+            </a:r>
+          </a:p>
+          <a:p>
+            <a:r>
+              <a:t>Chaque argument doit avoir un exemple Java concret.</a:t>
+            </a:r>
+          </a:p>
+          <a:p>
+            <a:r>
+              <a:t>Durée : 30 min écriture + 15 min relecture croisée.</a:t>
+            </a:r>
           </a:p>
         </p:txBody>
       </p:sp>
@@ -591,10 +604,13 @@
           <a:lstStyle/>
           <a:p>
             <a:r>
-              <a:rPr lang="en-US" dirty="0"/>
-              <a:t/>
-            </a:r>
-            <a:endParaRPr lang="en-US" dirty="0"/>
+              <a:t>PROF: Questions pour stimuler la réflexion critique.</a:t>
+            </a:r>
+          </a:p>
+          <a:p>
+            <a:r>
+              <a:t>Attention : les étudiants ont tendance à dire 'ADT = POO'. Corriger : ADT est la BASE, POO ÉTEND.</a:t>
+            </a:r>
           </a:p>
         </p:txBody>
       </p:sp>
@@ -679,10 +695,8 @@
           <a:lstStyle/>
           <a:p>
             <a:r>
-              <a:rPr lang="en-US" dirty="0"/>
-              <a:t/>
-            </a:r>
-            <a:endParaRPr lang="en-US" dirty="0"/>
+              <a:t>PROF: Récap des 5 arguments — faire réciter par 5 étudiants différents.</a:t>
+            </a:r>
           </a:p>
         </p:txBody>
       </p:sp>
